--- a/data/outputs/v2/Grade11/Biology/Quizzes/SS2.2_Growth_and_Development_in_Plants/Biology_G11_SS2.2_Growth_and_Development_in_Plants_L9_QuickCheck.pptx
+++ b/data/outputs/v2/Grade11/Biology/Quizzes/SS2.2_Growth_and_Development_in_Plants/Biology_G11_SS2.2_Growth_and_Development_in_Plants_L9_QuickCheck.pptx
@@ -14,9 +14,10 @@
     <p:sldId id="262" r:id="rId8"/>
     <p:sldId id="263" r:id="rId9"/>
     <p:sldId id="264" r:id="rId10"/>
+    <p:sldId id="265" r:id="rId11"/>
   </p:sldIdLst>
   <p:notesMasterIdLst>
-    <p:notesMasterId r:id="rId11"/>
+    <p:notesMasterId r:id="rId12"/>
   </p:notesMasterIdLst>
   <p:sldSz cx="12192000" cy="6858000"/>
   <p:notesSz cx="6858000" cy="12192000"/>
@@ -534,6 +535,94 @@
             <a:fld id="{F7021451-1387-4CA6-816F-3879F97B5CBC}" type="slidenum">
               <a:rPr lang="en-US"/>
               <a:t>1</a:t>
+            </a:fld>
+            <a:endParaRPr lang="en-US"/>
+          </a:p>
+        </p:txBody>
+      </p:sp>
+    </p:spTree>
+    <p:extLst>
+      <p:ext uri="{BB962C8B-B14F-4D97-AF65-F5344CB8AC3E}">
+        <p14:creationId xmlns:p14="http://schemas.microsoft.com/office/powerpoint/2010/main" val="1024086991"/>
+      </p:ext>
+    </p:extLst>
+  </p:cSld>
+  <p:clrMapOvr>
+    <a:masterClrMapping/>
+  </p:clrMapOvr>
+</p:notes>
+</file>
+
+<file path=ppt/notesSlides/notesSlide10.xml><?xml version="1.0" encoding="utf-8"?>
+<p:notes xmlns:a="http://schemas.openxmlformats.org/drawingml/2006/main" xmlns:r="http://schemas.openxmlformats.org/officeDocument/2006/relationships" xmlns:p="http://schemas.openxmlformats.org/presentationml/2006/main">
+  <p:cSld>
+    <p:spTree>
+      <p:nvGrpSpPr>
+        <p:cNvPr id="1" name=""/>
+        <p:cNvGrpSpPr/>
+        <p:nvPr/>
+      </p:nvGrpSpPr>
+      <p:grpSpPr>
+        <a:xfrm>
+          <a:off x="0" y="0"/>
+          <a:ext cx="0" cy="0"/>
+          <a:chOff x="0" y="0"/>
+          <a:chExt cx="0" cy="0"/>
+        </a:xfrm>
+      </p:grpSpPr>
+      <p:sp>
+        <p:nvSpPr>
+          <p:cNvPr id="2" name="Slide Image Placeholder 1"/>
+          <p:cNvSpPr>
+            <a:spLocks noGrp="1" noRot="1" noChangeAspect="1"/>
+          </p:cNvSpPr>
+          <p:nvPr>
+            <p:ph type="sldImg"/>
+          </p:nvPr>
+        </p:nvSpPr>
+        <p:spPr/>
+      </p:sp>
+      <p:sp>
+        <p:nvSpPr>
+          <p:cNvPr id="3" name="Notes Placeholder 2"/>
+          <p:cNvSpPr>
+            <a:spLocks noGrp="1"/>
+          </p:cNvSpPr>
+          <p:nvPr>
+            <p:ph type="body" idx="1"/>
+          </p:nvPr>
+        </p:nvSpPr>
+        <p:spPr/>
+        <p:txBody>
+          <a:bodyPr/>
+          <a:lstStyle/>
+          <a:p>
+            <a:r>
+              <a:rPr lang="en-US" dirty="0"/>
+              <a:t/>
+            </a:r>
+            <a:endParaRPr lang="en-US" dirty="0"/>
+          </a:p>
+        </p:txBody>
+      </p:sp>
+      <p:sp>
+        <p:nvSpPr>
+          <p:cNvPr id="4" name="Slide Number Placeholder 3"/>
+          <p:cNvSpPr>
+            <a:spLocks noGrp="1"/>
+          </p:cNvSpPr>
+          <p:nvPr>
+            <p:ph type="sldNum" sz="quarter" idx="10"/>
+          </p:nvPr>
+        </p:nvSpPr>
+        <p:spPr/>
+        <p:txBody>
+          <a:bodyPr/>
+          <a:lstStyle/>
+          <a:p>
+            <a:fld id="{F7021451-1387-4CA6-816F-3879F97B5CBC}" type="slidenum">
+              <a:rPr lang="en-US"/>
+              <a:t>10</a:t>
             </a:fld>
             <a:endParaRPr lang="en-US"/>
           </a:p>
@@ -1698,7 +1787,7 @@
                 <a:ea typeface="Arial" pitchFamily="34" charset="-122"/>
                 <a:cs typeface="Arial" pitchFamily="34" charset="-120"/>
               </a:rPr>
-              <a:t>Lesson 9: Role of Hormones in Plant Growth and Development: Why Do Maize and Bean Plants Grow Differently?</a:t>
+              <a:t>Lesson 9: Consolidating the Evidence and Building the Final Model: Why Did Mr. Wafula's Maize and Beans Behave So Differently?</a:t>
             </a:r>
             <a:endParaRPr lang="en-US" sz="1600" dirty="0"/>
           </a:p>
@@ -1737,7 +1826,7 @@
                 <a:ea typeface="Arial" pitchFamily="34" charset="-122"/>
                 <a:cs typeface="Arial" pitchFamily="34" charset="-120"/>
               </a:rPr>
-              <a:t>7 multiple-choice questions  •  choose A, B, C or D</a:t>
+              <a:t>8 multiple-choice questions  •  choose A, B, C or D</a:t>
             </a:r>
             <a:endParaRPr lang="en-US" sz="1600" dirty="0"/>
           </a:p>
@@ -1853,6 +1942,116 @@
               <a:t> (https://creativecommons.org/licenses/by-nc/4.0/).</a:t>
             </a:r>
             <a:endParaRPr lang="en-US" sz="900" dirty="0"/>
+          </a:p>
+        </p:txBody>
+      </p:sp>
+    </p:spTree>
+  </p:cSld>
+  <p:clrMapOvr>
+    <a:masterClrMapping/>
+  </p:clrMapOvr>
+</p:sld>
+</file>
+
+<file path=ppt/slides/slide10.xml><?xml version="1.0" encoding="utf-8"?>
+<p:sld xmlns:a="http://schemas.openxmlformats.org/drawingml/2006/main" xmlns:r="http://schemas.openxmlformats.org/officeDocument/2006/relationships" xmlns:p="http://schemas.openxmlformats.org/presentationml/2006/main">
+  <p:cSld name="Slide 10">
+    <p:bg>
+      <p:bgPr>
+        <a:solidFill>
+          <a:srgbClr val="1F3864"/>
+        </a:solidFill>
+      </p:bgPr>
+    </p:bg>
+    <p:spTree>
+      <p:nvGrpSpPr>
+        <p:cNvPr id="1" name=""/>
+        <p:cNvGrpSpPr/>
+        <p:nvPr/>
+      </p:nvGrpSpPr>
+      <p:grpSpPr>
+        <a:xfrm>
+          <a:off x="0" y="0"/>
+          <a:ext cx="0" cy="0"/>
+          <a:chOff x="0" y="0"/>
+          <a:chExt cx="0" cy="0"/>
+        </a:xfrm>
+      </p:grpSpPr>
+      <p:sp>
+        <p:nvSpPr>
+          <p:cNvPr id="2" name="Text 0"/>
+          <p:cNvSpPr/>
+          <p:nvPr/>
+        </p:nvSpPr>
+        <p:spPr>
+          <a:xfrm>
+            <a:off x="731520" y="2194560"/>
+            <a:ext cx="10698480" cy="822960"/>
+          </a:xfrm>
+          <a:prstGeom prst="rect">
+            <a:avLst/>
+          </a:prstGeom>
+          <a:noFill/>
+          <a:ln/>
+        </p:spPr>
+        <p:txBody>
+          <a:bodyPr wrap="square" lIns="0" tIns="0" rIns="0" bIns="0" rtlCol="0" anchor="ctr"/>
+          <a:lstStyle/>
+          <a:p>
+            <a:pPr indent="0" marL="0">
+              <a:buNone/>
+            </a:pPr>
+            <a:r>
+              <a:rPr lang="en-US" sz="3400" b="1" dirty="0">
+                <a:solidFill>
+                  <a:srgbClr val="FFFFFF"/>
+                </a:solidFill>
+                <a:latin typeface="Arial" pitchFamily="34" charset="0"/>
+                <a:ea typeface="Arial" pitchFamily="34" charset="-122"/>
+                <a:cs typeface="Arial" pitchFamily="34" charset="-120"/>
+              </a:rPr>
+              <a:t>All done</a:t>
+            </a:r>
+            <a:endParaRPr lang="en-US" sz="3400" dirty="0"/>
+          </a:p>
+        </p:txBody>
+      </p:sp>
+      <p:sp>
+        <p:nvSpPr>
+          <p:cNvPr id="3" name="Text 1"/>
+          <p:cNvSpPr/>
+          <p:nvPr/>
+        </p:nvSpPr>
+        <p:spPr>
+          <a:xfrm>
+            <a:off x="731520" y="3108960"/>
+            <a:ext cx="10698480" cy="731520"/>
+          </a:xfrm>
+          <a:prstGeom prst="rect">
+            <a:avLst/>
+          </a:prstGeom>
+          <a:noFill/>
+          <a:ln/>
+        </p:spPr>
+        <p:txBody>
+          <a:bodyPr wrap="square" lIns="0" tIns="0" rIns="0" bIns="0" rtlCol="0" anchor="ctr"/>
+          <a:lstStyle/>
+          <a:p>
+            <a:pPr indent="0" marL="0">
+              <a:buNone/>
+            </a:pPr>
+            <a:r>
+              <a:rPr lang="en-US" sz="1800" dirty="0">
+                <a:solidFill>
+                  <a:srgbClr val="D9EEF1"/>
+                </a:solidFill>
+                <a:latin typeface="Arial" pitchFamily="34" charset="0"/>
+                <a:ea typeface="Arial" pitchFamily="34" charset="-122"/>
+                <a:cs typeface="Arial" pitchFamily="34" charset="-120"/>
+              </a:rPr>
+              <a:t>Ask your teacher how to submit your answers today (for example, on a paper answer slip).</a:t>
+            </a:r>
+            <a:endParaRPr lang="en-US" sz="1800" dirty="0"/>
           </a:p>
         </p:txBody>
       </p:sp>
@@ -1921,7 +2120,7 @@
                 <a:ea typeface="Arial" pitchFamily="34" charset="-122"/>
                 <a:cs typeface="Arial" pitchFamily="34" charset="-120"/>
               </a:rPr>
-              <a:t>QUESTION 1 OF 7</a:t>
+              <a:t>QUESTION 1 OF 8</a:t>
             </a:r>
             <a:endParaRPr lang="en-US" sz="1300" dirty="0"/>
           </a:p>
@@ -2013,17 +2212,17 @@
               <a:buNone/>
             </a:pPr>
             <a:r>
-              <a:rPr lang="en-US" sz="2000" b="1" dirty="0">
-                <a:solidFill>
-                  <a:srgbClr val="FFFFFF"/>
-                </a:solidFill>
-                <a:latin typeface="Arial" pitchFamily="34" charset="0"/>
-                <a:ea typeface="Arial" pitchFamily="34" charset="-122"/>
-                <a:cs typeface="Arial" pitchFamily="34" charset="-120"/>
-              </a:rPr>
-              <a:t>A farmer pinches off the very top (the shoot tip) of a young bean seedling. What is the most likely result after two weeks?</a:t>
-            </a:r>
-            <a:endParaRPr lang="en-US" sz="2000" dirty="0"/>
+              <a:rPr lang="en-US" sz="1800" b="1" dirty="0">
+                <a:solidFill>
+                  <a:srgbClr val="FFFFFF"/>
+                </a:solidFill>
+                <a:latin typeface="Arial" pitchFamily="34" charset="0"/>
+                <a:ea typeface="Arial" pitchFamily="34" charset="-122"/>
+                <a:cs typeface="Arial" pitchFamily="34" charset="-120"/>
+              </a:rPr>
+              <a:t>Mr. Wafula planted maize and beans on the same day, in the same field, after the same 25 mm of rain. Yet the two crops differed in germination, emergence and growth. Which statement best explains the differences?</a:t>
+            </a:r>
+            <a:endParaRPr lang="en-US" sz="1800" dirty="0"/>
           </a:p>
         </p:txBody>
       </p:sp>
@@ -2113,17 +2312,17 @@
               <a:buNone/>
             </a:pPr>
             <a:r>
-              <a:rPr lang="en-US" sz="1700" dirty="0">
-                <a:solidFill>
-                  <a:srgbClr val="FFFFFF"/>
-                </a:solidFill>
-                <a:latin typeface="Arial" pitchFamily="34" charset="0"/>
-                <a:ea typeface="Arial" pitchFamily="34" charset="-122"/>
-                <a:cs typeface="Arial" pitchFamily="34" charset="-120"/>
-              </a:rPr>
-              <a:t>More side branches grow because the tip no longer holds back the side buds</a:t>
-            </a:r>
-            <a:endParaRPr lang="en-US" sz="1700" dirty="0"/>
+              <a:rPr lang="en-US" sz="1300" dirty="0">
+                <a:solidFill>
+                  <a:srgbClr val="FFFFFF"/>
+                </a:solidFill>
+                <a:latin typeface="Arial" pitchFamily="34" charset="0"/>
+                <a:ea typeface="Arial" pitchFamily="34" charset="-122"/>
+                <a:cs typeface="Arial" pitchFamily="34" charset="-120"/>
+              </a:rPr>
+              <a:t>The two crops were planted on different days.</a:t>
+            </a:r>
+            <a:endParaRPr lang="en-US" sz="1300" dirty="0"/>
           </a:p>
         </p:txBody>
       </p:sp>
@@ -2213,17 +2412,17 @@
               <a:buNone/>
             </a:pPr>
             <a:r>
-              <a:rPr lang="en-US" sz="1700" dirty="0">
-                <a:solidFill>
-                  <a:srgbClr val="FFFFFF"/>
-                </a:solidFill>
-                <a:latin typeface="Arial" pitchFamily="34" charset="0"/>
-                <a:ea typeface="Arial" pitchFamily="34" charset="-122"/>
-                <a:cs typeface="Arial" pitchFamily="34" charset="-120"/>
-              </a:rPr>
-              <a:t>The plant dies because the tip is cut off</a:t>
-            </a:r>
-            <a:endParaRPr lang="en-US" sz="1700" dirty="0"/>
+              <a:rPr lang="en-US" sz="1300" dirty="0">
+                <a:solidFill>
+                  <a:srgbClr val="FFFFFF"/>
+                </a:solidFill>
+                <a:latin typeface="Arial" pitchFamily="34" charset="0"/>
+                <a:ea typeface="Arial" pitchFamily="34" charset="-122"/>
+                <a:cs typeface="Arial" pitchFamily="34" charset="-120"/>
+              </a:rPr>
+              <a:t>The beans received less rain than the maize.</a:t>
+            </a:r>
+            <a:endParaRPr lang="en-US" sz="1300" dirty="0"/>
           </a:p>
         </p:txBody>
       </p:sp>
@@ -2313,17 +2512,17 @@
               <a:buNone/>
             </a:pPr>
             <a:r>
-              <a:rPr lang="en-US" sz="1700" dirty="0">
-                <a:solidFill>
-                  <a:srgbClr val="FFFFFF"/>
-                </a:solidFill>
-                <a:latin typeface="Arial" pitchFamily="34" charset="0"/>
-                <a:ea typeface="Arial" pitchFamily="34" charset="-122"/>
-                <a:cs typeface="Arial" pitchFamily="34" charset="-120"/>
-              </a:rPr>
-              <a:t>Nothing changes because plants grow only from water and soil</a:t>
-            </a:r>
-            <a:endParaRPr lang="en-US" sz="1700" dirty="0"/>
+              <a:rPr lang="en-US" sz="1300" dirty="0">
+                <a:solidFill>
+                  <a:srgbClr val="FFFFFF"/>
+                </a:solidFill>
+                <a:latin typeface="Arial" pitchFamily="34" charset="0"/>
+                <a:ea typeface="Arial" pitchFamily="34" charset="-122"/>
+                <a:cs typeface="Arial" pitchFamily="34" charset="-120"/>
+              </a:rPr>
+              <a:t>Healthy-looking seeds always germinate, so the differences were only due to chance.</a:t>
+            </a:r>
+            <a:endParaRPr lang="en-US" sz="1300" dirty="0"/>
           </a:p>
         </p:txBody>
       </p:sp>
@@ -2413,17 +2612,17 @@
               <a:buNone/>
             </a:pPr>
             <a:r>
-              <a:rPr lang="en-US" sz="1700" dirty="0">
-                <a:solidFill>
-                  <a:srgbClr val="FFFFFF"/>
-                </a:solidFill>
-                <a:latin typeface="Arial" pitchFamily="34" charset="0"/>
-                <a:ea typeface="Arial" pitchFamily="34" charset="-122"/>
-                <a:cs typeface="Arial" pitchFamily="34" charset="-120"/>
-              </a:rPr>
-              <a:t>The plant grows taller than before because it has less to feed</a:t>
-            </a:r>
-            <a:endParaRPr lang="en-US" sz="1700" dirty="0"/>
+              <a:rPr lang="en-US" sz="1300" dirty="0">
+                <a:solidFill>
+                  <a:srgbClr val="FFFFFF"/>
+                </a:solidFill>
+                <a:latin typeface="Arial" pitchFamily="34" charset="0"/>
+                <a:ea typeface="Arial" pitchFamily="34" charset="-122"/>
+                <a:cs typeface="Arial" pitchFamily="34" charset="-120"/>
+              </a:rPr>
+              <a:t>The differences come from seed structure, seed condition (such as dormancy or viability) and the environment (such as waterlogged patches).</a:t>
+            </a:r>
+            <a:endParaRPr lang="en-US" sz="1300" dirty="0"/>
           </a:p>
         </p:txBody>
       </p:sp>
@@ -2531,7 +2730,7 @@
                 <a:ea typeface="Arial" pitchFamily="34" charset="-122"/>
                 <a:cs typeface="Arial" pitchFamily="34" charset="-120"/>
               </a:rPr>
-              <a:t>QUESTION 2 OF 7</a:t>
+              <a:t>QUESTION 2 OF 8</a:t>
             </a:r>
             <a:endParaRPr lang="en-US" sz="1300" dirty="0"/>
           </a:p>
@@ -2623,17 +2822,17 @@
               <a:buNone/>
             </a:pPr>
             <a:r>
-              <a:rPr lang="en-US" sz="2000" b="1" dirty="0">
-                <a:solidFill>
-                  <a:srgbClr val="FFFFFF"/>
-                </a:solidFill>
-                <a:latin typeface="Arial" pitchFamily="34" charset="0"/>
-                <a:ea typeface="Arial" pitchFamily="34" charset="-122"/>
-                <a:cs typeface="Arial" pitchFamily="34" charset="-120"/>
-              </a:rPr>
-              <a:t>In the dry season, healthy seeds in the soil do not germinate even though they are not dead. Which plant hormone helps to keep these seeds dormant?</a:t>
-            </a:r>
-            <a:endParaRPr lang="en-US" sz="2000" dirty="0"/>
+              <a:rPr lang="en-US" sz="1800" b="1" dirty="0">
+                <a:solidFill>
+                  <a:srgbClr val="FFFFFF"/>
+                </a:solidFill>
+                <a:latin typeface="Arial" pitchFamily="34" charset="0"/>
+                <a:ea typeface="Arial" pitchFamily="34" charset="-122"/>
+                <a:cs typeface="Arial" pitchFamily="34" charset="-120"/>
+              </a:rPr>
+              <a:t>Out of 100 Rosecoco bean seeds, 20 did not germinate by Day 14. Of these, 8 had a hard seed coat. When the hard coats were nicked (scarified), 7 of the 8 seeds germinated. What does this show about the 8 hard-coated seeds?</a:t>
+            </a:r>
+            <a:endParaRPr lang="en-US" sz="1800" dirty="0"/>
           </a:p>
         </p:txBody>
       </p:sp>
@@ -2723,17 +2922,17 @@
               <a:buNone/>
             </a:pPr>
             <a:r>
-              <a:rPr lang="en-US" sz="1700" dirty="0">
-                <a:solidFill>
-                  <a:srgbClr val="FFFFFF"/>
-                </a:solidFill>
-                <a:latin typeface="Arial" pitchFamily="34" charset="0"/>
-                <a:ea typeface="Arial" pitchFamily="34" charset="-122"/>
-                <a:cs typeface="Arial" pitchFamily="34" charset="-120"/>
-              </a:rPr>
-              <a:t>Abscisic acid</a:t>
-            </a:r>
-            <a:endParaRPr lang="en-US" sz="1700" dirty="0"/>
+              <a:rPr lang="en-US" sz="1500" dirty="0">
+                <a:solidFill>
+                  <a:srgbClr val="FFFFFF"/>
+                </a:solidFill>
+                <a:latin typeface="Arial" pitchFamily="34" charset="0"/>
+                <a:ea typeface="Arial" pitchFamily="34" charset="-122"/>
+                <a:cs typeface="Arial" pitchFamily="34" charset="-120"/>
+              </a:rPr>
+              <a:t>They needed more rain because they were planted too deep.</a:t>
+            </a:r>
+            <a:endParaRPr lang="en-US" sz="1500" dirty="0"/>
           </a:p>
         </p:txBody>
       </p:sp>
@@ -2823,17 +3022,17 @@
               <a:buNone/>
             </a:pPr>
             <a:r>
-              <a:rPr lang="en-US" sz="1700" dirty="0">
-                <a:solidFill>
-                  <a:srgbClr val="FFFFFF"/>
-                </a:solidFill>
-                <a:latin typeface="Arial" pitchFamily="34" charset="0"/>
-                <a:ea typeface="Arial" pitchFamily="34" charset="-122"/>
-                <a:cs typeface="Arial" pitchFamily="34" charset="-120"/>
-              </a:rPr>
-              <a:t>Cytokinins</a:t>
-            </a:r>
-            <a:endParaRPr lang="en-US" sz="1700" dirty="0"/>
+              <a:rPr lang="en-US" sz="1500" dirty="0">
+                <a:solidFill>
+                  <a:srgbClr val="FFFFFF"/>
+                </a:solidFill>
+                <a:latin typeface="Arial" pitchFamily="34" charset="0"/>
+                <a:ea typeface="Arial" pitchFamily="34" charset="-122"/>
+                <a:cs typeface="Arial" pitchFamily="34" charset="-120"/>
+              </a:rPr>
+              <a:t>They were eaten by pests, and nicking removed the pests.</a:t>
+            </a:r>
+            <a:endParaRPr lang="en-US" sz="1500" dirty="0"/>
           </a:p>
         </p:txBody>
       </p:sp>
@@ -2923,17 +3122,17 @@
               <a:buNone/>
             </a:pPr>
             <a:r>
-              <a:rPr lang="en-US" sz="1700" dirty="0">
-                <a:solidFill>
-                  <a:srgbClr val="FFFFFF"/>
-                </a:solidFill>
-                <a:latin typeface="Arial" pitchFamily="34" charset="0"/>
-                <a:ea typeface="Arial" pitchFamily="34" charset="-122"/>
-                <a:cs typeface="Arial" pitchFamily="34" charset="-120"/>
-              </a:rPr>
-              <a:t>Gibberellins</a:t>
-            </a:r>
-            <a:endParaRPr lang="en-US" sz="1700" dirty="0"/>
+              <a:rPr lang="en-US" sz="1500" dirty="0">
+                <a:solidFill>
+                  <a:srgbClr val="FFFFFF"/>
+                </a:solidFill>
+                <a:latin typeface="Arial" pitchFamily="34" charset="0"/>
+                <a:ea typeface="Arial" pitchFamily="34" charset="-122"/>
+                <a:cs typeface="Arial" pitchFamily="34" charset="-120"/>
+              </a:rPr>
+              <a:t>They were dead (non-viable) and germinated by chance.</a:t>
+            </a:r>
+            <a:endParaRPr lang="en-US" sz="1500" dirty="0"/>
           </a:p>
         </p:txBody>
       </p:sp>
@@ -3023,17 +3222,17 @@
               <a:buNone/>
             </a:pPr>
             <a:r>
-              <a:rPr lang="en-US" sz="1700" dirty="0">
-                <a:solidFill>
-                  <a:srgbClr val="FFFFFF"/>
-                </a:solidFill>
-                <a:latin typeface="Arial" pitchFamily="34" charset="0"/>
-                <a:ea typeface="Arial" pitchFamily="34" charset="-122"/>
-                <a:cs typeface="Arial" pitchFamily="34" charset="-120"/>
-              </a:rPr>
-              <a:t>Ethylene</a:t>
-            </a:r>
-            <a:endParaRPr lang="en-US" sz="1700" dirty="0"/>
+              <a:rPr lang="en-US" sz="1500" dirty="0">
+                <a:solidFill>
+                  <a:srgbClr val="FFFFFF"/>
+                </a:solidFill>
+                <a:latin typeface="Arial" pitchFamily="34" charset="0"/>
+                <a:ea typeface="Arial" pitchFamily="34" charset="-122"/>
+                <a:cs typeface="Arial" pitchFamily="34" charset="-120"/>
+              </a:rPr>
+              <a:t>They were alive but dormant, because the hard seed coat stopped water from entering.</a:t>
+            </a:r>
+            <a:endParaRPr lang="en-US" sz="1500" dirty="0"/>
           </a:p>
         </p:txBody>
       </p:sp>
@@ -3141,7 +3340,7 @@
                 <a:ea typeface="Arial" pitchFamily="34" charset="-122"/>
                 <a:cs typeface="Arial" pitchFamily="34" charset="-120"/>
               </a:rPr>
-              <a:t>QUESTION 3 OF 7</a:t>
+              <a:t>QUESTION 3 OF 8</a:t>
             </a:r>
             <a:endParaRPr lang="en-US" sz="1300" dirty="0"/>
           </a:p>
@@ -3241,7 +3440,7 @@
                 <a:ea typeface="Arial" pitchFamily="34" charset="-122"/>
                 <a:cs typeface="Arial" pitchFamily="34" charset="-120"/>
               </a:rPr>
-              <a:t>Two bean seedlings were grown for two weeks. The intact seedling was 30 cm tall with 0 side branches. The seedling with its tip pinched off was 18 cm tall with 4 side branches. Which conclusion is best supported by these results?</a:t>
+              <a:t>Twenty bean seeds were placed in each of four jars for 5 days. Results: water + air + 25 °C = 18 germinated; dry seeds = 0 germinated; water but no air = 1 germinated; water + air at 4 °C = 0 germinated. What is the best conclusion?</a:t>
             </a:r>
             <a:endParaRPr lang="en-US" sz="1800" dirty="0"/>
           </a:p>
@@ -3333,17 +3532,17 @@
               <a:buNone/>
             </a:pPr>
             <a:r>
-              <a:rPr lang="en-US" sz="1500" dirty="0">
-                <a:solidFill>
-                  <a:srgbClr val="FFFFFF"/>
-                </a:solidFill>
-                <a:latin typeface="Arial" pitchFamily="34" charset="0"/>
-                <a:ea typeface="Arial" pitchFamily="34" charset="-122"/>
-                <a:cs typeface="Arial" pitchFamily="34" charset="-120"/>
-              </a:rPr>
-              <a:t>Removing the tip kills the plant, so it cannot grow taller</a:t>
-            </a:r>
-            <a:endParaRPr lang="en-US" sz="1500" dirty="0"/>
+              <a:rPr lang="en-US" sz="1700" dirty="0">
+                <a:solidFill>
+                  <a:srgbClr val="FFFFFF"/>
+                </a:solidFill>
+                <a:latin typeface="Arial" pitchFamily="34" charset="0"/>
+                <a:ea typeface="Arial" pitchFamily="34" charset="-122"/>
+                <a:cs typeface="Arial" pitchFamily="34" charset="-120"/>
+              </a:rPr>
+              <a:t>Only water is needed for germination.</a:t>
+            </a:r>
+            <a:endParaRPr lang="en-US" sz="1700" dirty="0"/>
           </a:p>
         </p:txBody>
       </p:sp>
@@ -3433,17 +3632,17 @@
               <a:buNone/>
             </a:pPr>
             <a:r>
-              <a:rPr lang="en-US" sz="1500" dirty="0">
-                <a:solidFill>
-                  <a:srgbClr val="FFFFFF"/>
-                </a:solidFill>
-                <a:latin typeface="Arial" pitchFamily="34" charset="0"/>
-                <a:ea typeface="Arial" pitchFamily="34" charset="-122"/>
-                <a:cs typeface="Arial" pitchFamily="34" charset="-120"/>
-              </a:rPr>
-              <a:t>Hormones are found only in animals, so the plants differ by chance</a:t>
-            </a:r>
-            <a:endParaRPr lang="en-US" sz="1500" dirty="0"/>
+              <a:rPr lang="en-US" sz="1700" dirty="0">
+                <a:solidFill>
+                  <a:srgbClr val="FFFFFF"/>
+                </a:solidFill>
+                <a:latin typeface="Arial" pitchFamily="34" charset="0"/>
+                <a:ea typeface="Arial" pitchFamily="34" charset="-122"/>
+                <a:cs typeface="Arial" pitchFamily="34" charset="-120"/>
+              </a:rPr>
+              <a:t>Light is needed for germination, because the seeds in the warm jar germinated.</a:t>
+            </a:r>
+            <a:endParaRPr lang="en-US" sz="1700" dirty="0"/>
           </a:p>
         </p:txBody>
       </p:sp>
@@ -3533,17 +3732,17 @@
               <a:buNone/>
             </a:pPr>
             <a:r>
-              <a:rPr lang="en-US" sz="1500" dirty="0">
-                <a:solidFill>
-                  <a:srgbClr val="FFFFFF"/>
-                </a:solidFill>
-                <a:latin typeface="Arial" pitchFamily="34" charset="0"/>
-                <a:ea typeface="Arial" pitchFamily="34" charset="-122"/>
-                <a:cs typeface="Arial" pitchFamily="34" charset="-120"/>
-              </a:rPr>
-              <a:t>Side branches grow only when a plant is shorter than 20 cm</a:t>
-            </a:r>
-            <a:endParaRPr lang="en-US" sz="1500" dirty="0"/>
+              <a:rPr lang="en-US" sz="1700" dirty="0">
+                <a:solidFill>
+                  <a:srgbClr val="FFFFFF"/>
+                </a:solidFill>
+                <a:latin typeface="Arial" pitchFamily="34" charset="0"/>
+                <a:ea typeface="Arial" pitchFamily="34" charset="-122"/>
+                <a:cs typeface="Arial" pitchFamily="34" charset="-120"/>
+              </a:rPr>
+              <a:t>Seeds need water, oxygen and a suitable temperature together to germinate.</a:t>
+            </a:r>
+            <a:endParaRPr lang="en-US" sz="1700" dirty="0"/>
           </a:p>
         </p:txBody>
       </p:sp>
@@ -3633,17 +3832,17 @@
               <a:buNone/>
             </a:pPr>
             <a:r>
-              <a:rPr lang="en-US" sz="1500" dirty="0">
-                <a:solidFill>
-                  <a:srgbClr val="FFFFFF"/>
-                </a:solidFill>
-                <a:latin typeface="Arial" pitchFamily="34" charset="0"/>
-                <a:ea typeface="Arial" pitchFamily="34" charset="-122"/>
-                <a:cs typeface="Arial" pitchFamily="34" charset="-120"/>
-              </a:rPr>
-              <a:t>Removing the shoot tip allowed side buds to grow, so the tip normally suppresses branching</a:t>
-            </a:r>
-            <a:endParaRPr lang="en-US" sz="1500" dirty="0"/>
+              <a:rPr lang="en-US" sz="1700" dirty="0">
+                <a:solidFill>
+                  <a:srgbClr val="FFFFFF"/>
+                </a:solidFill>
+                <a:latin typeface="Arial" pitchFamily="34" charset="0"/>
+                <a:ea typeface="Arial" pitchFamily="34" charset="-122"/>
+                <a:cs typeface="Arial" pitchFamily="34" charset="-120"/>
+              </a:rPr>
+              <a:t>Cold temperatures speed up germination.</a:t>
+            </a:r>
+            <a:endParaRPr lang="en-US" sz="1700" dirty="0"/>
           </a:p>
         </p:txBody>
       </p:sp>
@@ -3751,7 +3950,7 @@
                 <a:ea typeface="Arial" pitchFamily="34" charset="-122"/>
                 <a:cs typeface="Arial" pitchFamily="34" charset="-120"/>
               </a:rPr>
-              <a:t>QUESTION 4 OF 7</a:t>
+              <a:t>QUESTION 4 OF 8</a:t>
             </a:r>
             <a:endParaRPr lang="en-US" sz="1300" dirty="0"/>
           </a:p>
@@ -3812,7 +4011,7 @@
                 <a:ea typeface="Arial" pitchFamily="34" charset="-122"/>
                 <a:cs typeface="Arial" pitchFamily="34" charset="-120"/>
               </a:rPr>
-              <a:t>Use after: Observe phase</a:t>
+              <a:t>Use after: Explain phase</a:t>
             </a:r>
             <a:endParaRPr lang="en-US" sz="1100" dirty="0"/>
           </a:p>
@@ -3843,17 +4042,17 @@
               <a:buNone/>
             </a:pPr>
             <a:r>
-              <a:rPr lang="en-US" sz="2300" b="1" dirty="0">
-                <a:solidFill>
-                  <a:srgbClr val="FFFFFF"/>
-                </a:solidFill>
-                <a:latin typeface="Arial" pitchFamily="34" charset="0"/>
-                <a:ea typeface="Arial" pitchFamily="34" charset="-122"/>
-                <a:cs typeface="Arial" pitchFamily="34" charset="-120"/>
-              </a:rPr>
-              <a:t>Traders in Mombasa put green bananas in a closed sack and they ripen faster. Which explanation is correct?</a:t>
-            </a:r>
-            <a:endParaRPr lang="en-US" sz="2300" dirty="0"/>
+              <a:rPr lang="en-US" sz="2000" b="1" dirty="0">
+                <a:solidFill>
+                  <a:srgbClr val="FFFFFF"/>
+                </a:solidFill>
+                <a:latin typeface="Arial" pitchFamily="34" charset="0"/>
+                <a:ea typeface="Arial" pitchFamily="34" charset="-122"/>
+                <a:cs typeface="Arial" pitchFamily="34" charset="-120"/>
+              </a:rPr>
+              <a:t>The height of a maize plant was 62 cm on Day 28 and 98 cm on Day 35. By how many centimetres did it grow during that week?</a:t>
+            </a:r>
+            <a:endParaRPr lang="en-US" sz="2000" dirty="0"/>
           </a:p>
         </p:txBody>
       </p:sp>
@@ -3951,7 +4150,7 @@
                 <a:ea typeface="Arial" pitchFamily="34" charset="-122"/>
                 <a:cs typeface="Arial" pitchFamily="34" charset="-120"/>
               </a:rPr>
-              <a:t>Abscisic acid is released and speeds up the ripening</a:t>
+              <a:t>27 cm</a:t>
             </a:r>
             <a:endParaRPr lang="en-US" sz="1700" dirty="0"/>
           </a:p>
@@ -4051,7 +4250,7 @@
                 <a:ea typeface="Arial" pitchFamily="34" charset="-122"/>
                 <a:cs typeface="Arial" pitchFamily="34" charset="-120"/>
               </a:rPr>
-              <a:t>Ethylene gas given off by the fruit collects in the sack and speeds up ripening</a:t>
+              <a:t>98 cm</a:t>
             </a:r>
             <a:endParaRPr lang="en-US" sz="1700" dirty="0"/>
           </a:p>
@@ -4151,7 +4350,7 @@
                 <a:ea typeface="Arial" pitchFamily="34" charset="-122"/>
                 <a:cs typeface="Arial" pitchFamily="34" charset="-120"/>
               </a:rPr>
-              <a:t>Auxin builds up in the sack and makes the fruit softer</a:t>
+              <a:t>36 cm</a:t>
             </a:r>
             <a:endParaRPr lang="en-US" sz="1700" dirty="0"/>
           </a:p>
@@ -4251,7 +4450,7 @@
                 <a:ea typeface="Arial" pitchFamily="34" charset="-122"/>
                 <a:cs typeface="Arial" pitchFamily="34" charset="-120"/>
               </a:rPr>
-              <a:t>Cytokinins from the sack make the fruit cells divide faster</a:t>
+              <a:t>32 cm</a:t>
             </a:r>
             <a:endParaRPr lang="en-US" sz="1700" dirty="0"/>
           </a:p>
@@ -4361,7 +4560,7 @@
                 <a:ea typeface="Arial" pitchFamily="34" charset="-122"/>
                 <a:cs typeface="Arial" pitchFamily="34" charset="-120"/>
               </a:rPr>
-              <a:t>QUESTION 5 OF 7</a:t>
+              <a:t>QUESTION 5 OF 8</a:t>
             </a:r>
             <a:endParaRPr lang="en-US" sz="1300" dirty="0"/>
           </a:p>
@@ -4453,17 +4652,17 @@
               <a:buNone/>
             </a:pPr>
             <a:r>
-              <a:rPr lang="en-US" sz="2300" b="1" dirty="0">
-                <a:solidFill>
-                  <a:srgbClr val="FFFFFF"/>
-                </a:solidFill>
-                <a:latin typeface="Arial" pitchFamily="34" charset="0"/>
-                <a:ea typeface="Arial" pitchFamily="34" charset="-122"/>
-                <a:cs typeface="Arial" pitchFamily="34" charset="-120"/>
-              </a:rPr>
-              <a:t>What does the term 'apical dominance' mean?</a:t>
-            </a:r>
-            <a:endParaRPr lang="en-US" sz="2300" dirty="0"/>
+              <a:rPr lang="en-US" sz="2000" b="1" dirty="0">
+                <a:solidFill>
+                  <a:srgbClr val="FFFFFF"/>
+                </a:solidFill>
+                <a:latin typeface="Arial" pitchFamily="34" charset="0"/>
+                <a:ea typeface="Arial" pitchFamily="34" charset="-122"/>
+                <a:cs typeface="Arial" pitchFamily="34" charset="-120"/>
+              </a:rPr>
+              <a:t>A maize stem became thicker, from 6 mm at Day 14 to 22 mm at Day 42, even though maize has no vascular cambium. How does the maize stem thicken?</a:t>
+            </a:r>
+            <a:endParaRPr lang="en-US" sz="2000" dirty="0"/>
           </a:p>
         </p:txBody>
       </p:sp>
@@ -4553,17 +4752,17 @@
               <a:buNone/>
             </a:pPr>
             <a:r>
-              <a:rPr lang="en-US" sz="1700" dirty="0">
-                <a:solidFill>
-                  <a:srgbClr val="FFFFFF"/>
-                </a:solidFill>
-                <a:latin typeface="Arial" pitchFamily="34" charset="0"/>
-                <a:ea typeface="Arial" pitchFamily="34" charset="-122"/>
-                <a:cs typeface="Arial" pitchFamily="34" charset="-120"/>
-              </a:rPr>
-              <a:t>The shoot tip bends towards light because of gibberellins</a:t>
-            </a:r>
-            <a:endParaRPr lang="en-US" sz="1700" dirty="0"/>
+              <a:rPr lang="en-US" sz="1500" dirty="0">
+                <a:solidFill>
+                  <a:srgbClr val="FFFFFF"/>
+                </a:solidFill>
+                <a:latin typeface="Arial" pitchFamily="34" charset="0"/>
+                <a:ea typeface="Arial" pitchFamily="34" charset="-122"/>
+                <a:cs typeface="Arial" pitchFamily="34" charset="-120"/>
+              </a:rPr>
+              <a:t>Thickening is not growth, because growth means only an increase in height.</a:t>
+            </a:r>
+            <a:endParaRPr lang="en-US" sz="1500" dirty="0"/>
           </a:p>
         </p:txBody>
       </p:sp>
@@ -4653,17 +4852,17 @@
               <a:buNone/>
             </a:pPr>
             <a:r>
-              <a:rPr lang="en-US" sz="1700" dirty="0">
-                <a:solidFill>
-                  <a:srgbClr val="FFFFFF"/>
-                </a:solidFill>
-                <a:latin typeface="Arial" pitchFamily="34" charset="0"/>
-                <a:ea typeface="Arial" pitchFamily="34" charset="-122"/>
-                <a:cs typeface="Arial" pitchFamily="34" charset="-120"/>
-              </a:rPr>
-              <a:t>The side buds always grow faster than the main shoot</a:t>
-            </a:r>
-            <a:endParaRPr lang="en-US" sz="1700" dirty="0"/>
+              <a:rPr lang="en-US" sz="1500" dirty="0">
+                <a:solidFill>
+                  <a:srgbClr val="FFFFFF"/>
+                </a:solidFill>
+                <a:latin typeface="Arial" pitchFamily="34" charset="0"/>
+                <a:ea typeface="Arial" pitchFamily="34" charset="-122"/>
+                <a:cs typeface="Arial" pitchFamily="34" charset="-120"/>
+              </a:rPr>
+              <a:t>It does not really grow thicker; the stem only swells with water.</a:t>
+            </a:r>
+            <a:endParaRPr lang="en-US" sz="1500" dirty="0"/>
           </a:p>
         </p:txBody>
       </p:sp>
@@ -4753,17 +4952,17 @@
               <a:buNone/>
             </a:pPr>
             <a:r>
-              <a:rPr lang="en-US" sz="1700" dirty="0">
-                <a:solidFill>
-                  <a:srgbClr val="FFFFFF"/>
-                </a:solidFill>
-                <a:latin typeface="Arial" pitchFamily="34" charset="0"/>
-                <a:ea typeface="Arial" pitchFamily="34" charset="-122"/>
-                <a:cs typeface="Arial" pitchFamily="34" charset="-120"/>
-              </a:rPr>
-              <a:t>The shoot tip makes auxin that holds back the growth of side buds</a:t>
-            </a:r>
-            <a:endParaRPr lang="en-US" sz="1700" dirty="0"/>
+              <a:rPr lang="en-US" sz="1500" dirty="0">
+                <a:solidFill>
+                  <a:srgbClr val="FFFFFF"/>
+                </a:solidFill>
+                <a:latin typeface="Arial" pitchFamily="34" charset="0"/>
+                <a:ea typeface="Arial" pitchFamily="34" charset="-122"/>
+                <a:cs typeface="Arial" pitchFamily="34" charset="-120"/>
+              </a:rPr>
+              <a:t>By primary growth, through cell division and enlargement of tissues produced at the apical meristem.</a:t>
+            </a:r>
+            <a:endParaRPr lang="en-US" sz="1500" dirty="0"/>
           </a:p>
         </p:txBody>
       </p:sp>
@@ -4853,17 +5052,17 @@
               <a:buNone/>
             </a:pPr>
             <a:r>
-              <a:rPr lang="en-US" sz="1700" dirty="0">
-                <a:solidFill>
-                  <a:srgbClr val="FFFFFF"/>
-                </a:solidFill>
-                <a:latin typeface="Arial" pitchFamily="34" charset="0"/>
-                <a:ea typeface="Arial" pitchFamily="34" charset="-122"/>
-                <a:cs typeface="Arial" pitchFamily="34" charset="-120"/>
-              </a:rPr>
-              <a:t>The root tip controls how fast the shoot grows</a:t>
-            </a:r>
-            <a:endParaRPr lang="en-US" sz="1700" dirty="0"/>
+              <a:rPr lang="en-US" sz="1500" dirty="0">
+                <a:solidFill>
+                  <a:srgbClr val="FFFFFF"/>
+                </a:solidFill>
+                <a:latin typeface="Arial" pitchFamily="34" charset="0"/>
+                <a:ea typeface="Arial" pitchFamily="34" charset="-122"/>
+                <a:cs typeface="Arial" pitchFamily="34" charset="-120"/>
+              </a:rPr>
+              <a:t>By secondary growth from the vascular cambium, as in the bean.</a:t>
+            </a:r>
+            <a:endParaRPr lang="en-US" sz="1500" dirty="0"/>
           </a:p>
         </p:txBody>
       </p:sp>
@@ -4971,7 +5170,7 @@
                 <a:ea typeface="Arial" pitchFamily="34" charset="-122"/>
                 <a:cs typeface="Arial" pitchFamily="34" charset="-120"/>
               </a:rPr>
-              <a:t>QUESTION 6 OF 7</a:t>
+              <a:t>QUESTION 6 OF 8</a:t>
             </a:r>
             <a:endParaRPr lang="en-US" sz="1300" dirty="0"/>
           </a:p>
@@ -5063,17 +5262,17 @@
               <a:buNone/>
             </a:pPr>
             <a:r>
-              <a:rPr lang="en-US" sz="2300" b="1" dirty="0">
-                <a:solidFill>
-                  <a:srgbClr val="FFFFFF"/>
-                </a:solidFill>
-                <a:latin typeface="Arial" pitchFamily="34" charset="0"/>
-                <a:ea typeface="Arial" pitchFamily="34" charset="-122"/>
-                <a:cs typeface="Arial" pitchFamily="34" charset="-120"/>
-              </a:rPr>
-              <a:t>Tea farmers in Kericho prune their tea bushes regularly. How does pruning help?</a:t>
-            </a:r>
-            <a:endParaRPr lang="en-US" sz="2300" dirty="0"/>
+              <a:rPr lang="en-US" sz="2000" b="1" dirty="0">
+                <a:solidFill>
+                  <a:srgbClr val="FFFFFF"/>
+                </a:solidFill>
+                <a:latin typeface="Arial" pitchFamily="34" charset="0"/>
+                <a:ea typeface="Arial" pitchFamily="34" charset="-122"/>
+                <a:cs typeface="Arial" pitchFamily="34" charset="-120"/>
+              </a:rPr>
+              <a:t>A bean seedling emerges with its seed leaves (cotyledons) lifted above the soil. A maize seedling emerges with its scutellum staying underground. Which description is correct?</a:t>
+            </a:r>
+            <a:endParaRPr lang="en-US" sz="2000" dirty="0"/>
           </a:p>
         </p:txBody>
       </p:sp>
@@ -5163,17 +5362,17 @@
               <a:buNone/>
             </a:pPr>
             <a:r>
-              <a:rPr lang="en-US" sz="1500" dirty="0">
-                <a:solidFill>
-                  <a:srgbClr val="FFFFFF"/>
-                </a:solidFill>
-                <a:latin typeface="Arial" pitchFamily="34" charset="0"/>
-                <a:ea typeface="Arial" pitchFamily="34" charset="-122"/>
-                <a:cs typeface="Arial" pitchFamily="34" charset="-120"/>
-              </a:rPr>
-              <a:t>It removes the shoot tips, which reduces apical dominance so side buds grow and the bush becomes bushy</a:t>
-            </a:r>
-            <a:endParaRPr lang="en-US" sz="1500" dirty="0"/>
+              <a:rPr lang="en-US" sz="1700" dirty="0">
+                <a:solidFill>
+                  <a:srgbClr val="FFFFFF"/>
+                </a:solidFill>
+                <a:latin typeface="Arial" pitchFamily="34" charset="0"/>
+                <a:ea typeface="Arial" pitchFamily="34" charset="-122"/>
+                <a:cs typeface="Arial" pitchFamily="34" charset="-120"/>
+              </a:rPr>
+              <a:t>Bean emergence is epigeal and maize emergence is hypogeal.</a:t>
+            </a:r>
+            <a:endParaRPr lang="en-US" sz="1700" dirty="0"/>
           </a:p>
         </p:txBody>
       </p:sp>
@@ -5263,17 +5462,17 @@
               <a:buNone/>
             </a:pPr>
             <a:r>
-              <a:rPr lang="en-US" sz="1500" dirty="0">
-                <a:solidFill>
-                  <a:srgbClr val="FFFFFF"/>
-                </a:solidFill>
-                <a:latin typeface="Arial" pitchFamily="34" charset="0"/>
-                <a:ea typeface="Arial" pitchFamily="34" charset="-122"/>
-                <a:cs typeface="Arial" pitchFamily="34" charset="-120"/>
-              </a:rPr>
-              <a:t>It makes the bush grow taller with one thick stem</a:t>
-            </a:r>
-            <a:endParaRPr lang="en-US" sz="1500" dirty="0"/>
+              <a:rPr lang="en-US" sz="1700" dirty="0">
+                <a:solidFill>
+                  <a:srgbClr val="FFFFFF"/>
+                </a:solidFill>
+                <a:latin typeface="Arial" pitchFamily="34" charset="0"/>
+                <a:ea typeface="Arial" pitchFamily="34" charset="-122"/>
+                <a:cs typeface="Arial" pitchFamily="34" charset="-120"/>
+              </a:rPr>
+              <a:t>Both bean and maize emergence are hypogeal.</a:t>
+            </a:r>
+            <a:endParaRPr lang="en-US" sz="1700" dirty="0"/>
           </a:p>
         </p:txBody>
       </p:sp>
@@ -5363,17 +5562,17 @@
               <a:buNone/>
             </a:pPr>
             <a:r>
-              <a:rPr lang="en-US" sz="1500" dirty="0">
-                <a:solidFill>
-                  <a:srgbClr val="FFFFFF"/>
-                </a:solidFill>
-                <a:latin typeface="Arial" pitchFamily="34" charset="0"/>
-                <a:ea typeface="Arial" pitchFamily="34" charset="-122"/>
-                <a:cs typeface="Arial" pitchFamily="34" charset="-120"/>
-              </a:rPr>
-              <a:t>It adds abscisic acid to the bush so that it stops growing</a:t>
-            </a:r>
-            <a:endParaRPr lang="en-US" sz="1500" dirty="0"/>
+              <a:rPr lang="en-US" sz="1700" dirty="0">
+                <a:solidFill>
+                  <a:srgbClr val="FFFFFF"/>
+                </a:solidFill>
+                <a:latin typeface="Arial" pitchFamily="34" charset="0"/>
+                <a:ea typeface="Arial" pitchFamily="34" charset="-122"/>
+                <a:cs typeface="Arial" pitchFamily="34" charset="-120"/>
+              </a:rPr>
+              <a:t>Both bean and maize emergence are epigeal.</a:t>
+            </a:r>
+            <a:endParaRPr lang="en-US" sz="1700" dirty="0"/>
           </a:p>
         </p:txBody>
       </p:sp>
@@ -5463,17 +5662,17 @@
               <a:buNone/>
             </a:pPr>
             <a:r>
-              <a:rPr lang="en-US" sz="1500" dirty="0">
-                <a:solidFill>
-                  <a:srgbClr val="FFFFFF"/>
-                </a:solidFill>
-                <a:latin typeface="Arial" pitchFamily="34" charset="0"/>
-                <a:ea typeface="Arial" pitchFamily="34" charset="-122"/>
-                <a:cs typeface="Arial" pitchFamily="34" charset="-120"/>
-              </a:rPr>
-              <a:t>It kills the old shoots so that only roots keep growing</a:t>
-            </a:r>
-            <a:endParaRPr lang="en-US" sz="1500" dirty="0"/>
+              <a:rPr lang="en-US" sz="1700" dirty="0">
+                <a:solidFill>
+                  <a:srgbClr val="FFFFFF"/>
+                </a:solidFill>
+                <a:latin typeface="Arial" pitchFamily="34" charset="0"/>
+                <a:ea typeface="Arial" pitchFamily="34" charset="-122"/>
+                <a:cs typeface="Arial" pitchFamily="34" charset="-120"/>
+              </a:rPr>
+              <a:t>Bean emergence is hypogeal and maize emergence is epigeal.</a:t>
+            </a:r>
+            <a:endParaRPr lang="en-US" sz="1700" dirty="0"/>
           </a:p>
         </p:txBody>
       </p:sp>
@@ -5581,7 +5780,7 @@
                 <a:ea typeface="Arial" pitchFamily="34" charset="-122"/>
                 <a:cs typeface="Arial" pitchFamily="34" charset="-120"/>
               </a:rPr>
-              <a:t>QUESTION 7 OF 7</a:t>
+              <a:t>QUESTION 7 OF 8</a:t>
             </a:r>
             <a:endParaRPr lang="en-US" sz="1300" dirty="0"/>
           </a:p>
@@ -5642,7 +5841,7 @@
                 <a:ea typeface="Arial" pitchFamily="34" charset="-122"/>
                 <a:cs typeface="Arial" pitchFamily="34" charset="-120"/>
               </a:rPr>
-              <a:t>Use after: Model Building phase</a:t>
+              <a:t>Use after: Explain phase</a:t>
             </a:r>
             <a:endParaRPr lang="en-US" sz="1100" dirty="0"/>
           </a:p>
@@ -5673,17 +5872,17 @@
               <a:buNone/>
             </a:pPr>
             <a:r>
-              <a:rPr lang="en-US" sz="2300" b="1" dirty="0">
-                <a:solidFill>
-                  <a:srgbClr val="FFFFFF"/>
-                </a:solidFill>
-                <a:latin typeface="Arial" pitchFamily="34" charset="0"/>
-                <a:ea typeface="Arial" pitchFamily="34" charset="-122"/>
-                <a:cs typeface="Arial" pitchFamily="34" charset="-120"/>
-              </a:rPr>
-              <a:t>A learner revises their Day 1 model of why maize and bean seeds behave differently. Which addition is correct?</a:t>
-            </a:r>
-            <a:endParaRPr lang="en-US" sz="2300" dirty="0"/>
+              <a:rPr lang="en-US" sz="2000" b="1" dirty="0">
+                <a:solidFill>
+                  <a:srgbClr val="FFFFFF"/>
+                </a:solidFill>
+                <a:latin typeface="Arial" pitchFamily="34" charset="0"/>
+                <a:ea typeface="Arial" pitchFamily="34" charset="-122"/>
+                <a:cs typeface="Arial" pitchFamily="34" charset="-120"/>
+              </a:rPr>
+              <a:t>A bean plant with its tip intact had 0 branches at Day 25. Another bean plant had its tip removed at Day 20 and had 3 branches by Day 32. What explains the branching?</a:t>
+            </a:r>
+            <a:endParaRPr lang="en-US" sz="2000" dirty="0"/>
           </a:p>
         </p:txBody>
       </p:sp>
@@ -5773,17 +5972,17 @@
               <a:buNone/>
             </a:pPr>
             <a:r>
-              <a:rPr lang="en-US" sz="1500" dirty="0">
-                <a:solidFill>
-                  <a:srgbClr val="FFFFFF"/>
-                </a:solidFill>
-                <a:latin typeface="Arial" pitchFamily="34" charset="0"/>
-                <a:ea typeface="Arial" pitchFamily="34" charset="-122"/>
-                <a:cs typeface="Arial" pitchFamily="34" charset="-120"/>
-              </a:rPr>
-              <a:t>Gibberellins promote germination, but the seed also needs water, oxygen and a suitable temperature to respond</a:t>
-            </a:r>
-            <a:endParaRPr lang="en-US" sz="1500" dirty="0"/>
+              <a:rPr lang="en-US" sz="1300" dirty="0">
+                <a:solidFill>
+                  <a:srgbClr val="FFFFFF"/>
+                </a:solidFill>
+                <a:latin typeface="Arial" pitchFamily="34" charset="0"/>
+                <a:ea typeface="Arial" pitchFamily="34" charset="-122"/>
+                <a:cs typeface="Arial" pitchFamily="34" charset="-120"/>
+              </a:rPr>
+              <a:t>Auxin from the apical bud inhibits the lateral buds (apical dominance); removing the tip removes this effect, and cytokinins help the lateral buds grow.</a:t>
+            </a:r>
+            <a:endParaRPr lang="en-US" sz="1300" dirty="0"/>
           </a:p>
         </p:txBody>
       </p:sp>
@@ -5873,17 +6072,17 @@
               <a:buNone/>
             </a:pPr>
             <a:r>
-              <a:rPr lang="en-US" sz="1500" dirty="0">
-                <a:solidFill>
-                  <a:srgbClr val="FFFFFF"/>
-                </a:solidFill>
-                <a:latin typeface="Arial" pitchFamily="34" charset="0"/>
-                <a:ea typeface="Arial" pitchFamily="34" charset="-122"/>
-                <a:cs typeface="Arial" pitchFamily="34" charset="-120"/>
-              </a:rPr>
-              <a:t>Hormones alone decide germination, so water and temperature can be removed from the model</a:t>
-            </a:r>
-            <a:endParaRPr lang="en-US" sz="1500" dirty="0"/>
+              <a:rPr lang="en-US" sz="1300" dirty="0">
+                <a:solidFill>
+                  <a:srgbClr val="FFFFFF"/>
+                </a:solidFill>
+                <a:latin typeface="Arial" pitchFamily="34" charset="0"/>
+                <a:ea typeface="Arial" pitchFamily="34" charset="-122"/>
+                <a:cs typeface="Arial" pitchFamily="34" charset="-120"/>
+              </a:rPr>
+              <a:t>The tip makes abscisic acid, which makes the plant grow lateral branches when removed.</a:t>
+            </a:r>
+            <a:endParaRPr lang="en-US" sz="1300" dirty="0"/>
           </a:p>
         </p:txBody>
       </p:sp>
@@ -5973,17 +6172,17 @@
               <a:buNone/>
             </a:pPr>
             <a:r>
-              <a:rPr lang="en-US" sz="1500" dirty="0">
-                <a:solidFill>
-                  <a:srgbClr val="FFFFFF"/>
-                </a:solidFill>
-                <a:latin typeface="Arial" pitchFamily="34" charset="0"/>
-                <a:ea typeface="Arial" pitchFamily="34" charset="-122"/>
-                <a:cs typeface="Arial" pitchFamily="34" charset="-120"/>
-              </a:rPr>
-              <a:t>Each hormone does only one job, so no arrows should link hormones to each other</a:t>
-            </a:r>
-            <a:endParaRPr lang="en-US" sz="1500" dirty="0"/>
+              <a:rPr lang="en-US" sz="1300" dirty="0">
+                <a:solidFill>
+                  <a:srgbClr val="FFFFFF"/>
+                </a:solidFill>
+                <a:latin typeface="Arial" pitchFamily="34" charset="0"/>
+                <a:ea typeface="Arial" pitchFamily="34" charset="-122"/>
+                <a:cs typeface="Arial" pitchFamily="34" charset="-120"/>
+              </a:rPr>
+              <a:t>Auxin from the apical bud promotes lateral buds, so removing the tip lowers branching.</a:t>
+            </a:r>
+            <a:endParaRPr lang="en-US" sz="1300" dirty="0"/>
           </a:p>
         </p:txBody>
       </p:sp>
@@ -6073,17 +6272,17 @@
               <a:buNone/>
             </a:pPr>
             <a:r>
-              <a:rPr lang="en-US" sz="1500" dirty="0">
-                <a:solidFill>
-                  <a:srgbClr val="FFFFFF"/>
-                </a:solidFill>
-                <a:latin typeface="Arial" pitchFamily="34" charset="0"/>
-                <a:ea typeface="Arial" pitchFamily="34" charset="-122"/>
-                <a:cs typeface="Arial" pitchFamily="34" charset="-120"/>
-              </a:rPr>
-              <a:t>Only animals have hormones, so the model should show only seed structure</a:t>
-            </a:r>
-            <a:endParaRPr lang="en-US" sz="1500" dirty="0"/>
+              <a:rPr lang="en-US" sz="1300" dirty="0">
+                <a:solidFill>
+                  <a:srgbClr val="FFFFFF"/>
+                </a:solidFill>
+                <a:latin typeface="Arial" pitchFamily="34" charset="0"/>
+                <a:ea typeface="Arial" pitchFamily="34" charset="-122"/>
+                <a:cs typeface="Arial" pitchFamily="34" charset="-120"/>
+              </a:rPr>
+              <a:t>Gibberellin from the tip stops branches from forming, and cutting adds more gibberellin.</a:t>
+            </a:r>
+            <a:endParaRPr lang="en-US" sz="1300" dirty="0"/>
           </a:p>
         </p:txBody>
       </p:sp>
@@ -6140,7 +6339,7 @@
     <p:bg>
       <p:bgPr>
         <a:solidFill>
-          <a:srgbClr val="1F3864"/>
+          <a:srgbClr val="6A4C93"/>
         </a:solidFill>
       </p:bgPr>
     </p:bg>
@@ -6166,73 +6365,573 @@
         </p:nvSpPr>
         <p:spPr>
           <a:xfrm>
-            <a:off x="731520" y="2194560"/>
-            <a:ext cx="10698480" cy="822960"/>
-          </a:xfrm>
-          <a:prstGeom prst="rect">
-            <a:avLst/>
-          </a:prstGeom>
-          <a:noFill/>
-          <a:ln/>
-        </p:spPr>
-        <p:txBody>
-          <a:bodyPr wrap="square" lIns="0" tIns="0" rIns="0" bIns="0" rtlCol="0" anchor="ctr"/>
-          <a:lstStyle/>
-          <a:p>
-            <a:pPr indent="0" marL="0">
-              <a:buNone/>
-            </a:pPr>
-            <a:r>
-              <a:rPr lang="en-US" sz="3400" b="1" dirty="0">
-                <a:solidFill>
-                  <a:srgbClr val="FFFFFF"/>
-                </a:solidFill>
-                <a:latin typeface="Arial" pitchFamily="34" charset="0"/>
-                <a:ea typeface="Arial" pitchFamily="34" charset="-122"/>
-                <a:cs typeface="Arial" pitchFamily="34" charset="-120"/>
-              </a:rPr>
-              <a:t>All done</a:t>
-            </a:r>
-            <a:endParaRPr lang="en-US" sz="3400" dirty="0"/>
-          </a:p>
-        </p:txBody>
-      </p:sp>
-      <p:sp>
-        <p:nvSpPr>
-          <p:cNvPr id="3" name="Text 1"/>
-          <p:cNvSpPr/>
-          <p:nvPr/>
-        </p:nvSpPr>
-        <p:spPr>
-          <a:xfrm>
-            <a:off x="731520" y="3108960"/>
-            <a:ext cx="10698480" cy="731520"/>
-          </a:xfrm>
-          <a:prstGeom prst="rect">
-            <a:avLst/>
-          </a:prstGeom>
-          <a:noFill/>
-          <a:ln/>
-        </p:spPr>
-        <p:txBody>
-          <a:bodyPr wrap="square" lIns="0" tIns="0" rIns="0" bIns="0" rtlCol="0" anchor="ctr"/>
-          <a:lstStyle/>
-          <a:p>
-            <a:pPr indent="0" marL="0">
-              <a:buNone/>
-            </a:pPr>
-            <a:r>
-              <a:rPr lang="en-US" sz="1800" dirty="0">
-                <a:solidFill>
-                  <a:srgbClr val="D9EEF1"/>
-                </a:solidFill>
-                <a:latin typeface="Arial" pitchFamily="34" charset="0"/>
-                <a:ea typeface="Arial" pitchFamily="34" charset="-122"/>
-                <a:cs typeface="Arial" pitchFamily="34" charset="-120"/>
-              </a:rPr>
-              <a:t>Ask your teacher how to submit your answers today (for example, on a paper answer slip).</a:t>
+            <a:off x="548640" y="365760"/>
+            <a:ext cx="6400800" cy="365760"/>
+          </a:xfrm>
+          <a:prstGeom prst="rect">
+            <a:avLst/>
+          </a:prstGeom>
+          <a:noFill/>
+          <a:ln/>
+        </p:spPr>
+        <p:txBody>
+          <a:bodyPr wrap="square" lIns="0" tIns="0" rIns="0" bIns="0" rtlCol="0" anchor="ctr"/>
+          <a:lstStyle/>
+          <a:p>
+            <a:pPr indent="0" marL="0">
+              <a:buNone/>
+            </a:pPr>
+            <a:r>
+              <a:rPr lang="en-US" sz="1300" b="1" spc="200" kern="0" dirty="0">
+                <a:solidFill>
+                  <a:srgbClr val="E0D6F0"/>
+                </a:solidFill>
+                <a:latin typeface="Arial" pitchFamily="34" charset="0"/>
+                <a:ea typeface="Arial" pitchFamily="34" charset="-122"/>
+                <a:cs typeface="Arial" pitchFamily="34" charset="-120"/>
+              </a:rPr>
+              <a:t>QUESTION 8 OF 8</a:t>
+            </a:r>
+            <a:endParaRPr lang="en-US" sz="1300" dirty="0"/>
+          </a:p>
+        </p:txBody>
+      </p:sp>
+      <p:sp>
+        <p:nvSpPr>
+          <p:cNvPr id="3" name="Shape 1"/>
+          <p:cNvSpPr/>
+          <p:nvPr/>
+        </p:nvSpPr>
+        <p:spPr>
+          <a:xfrm>
+            <a:off x="8138160" y="320040"/>
+            <a:ext cx="3474720" cy="365760"/>
+          </a:xfrm>
+          <a:prstGeom prst="roundRect">
+            <a:avLst>
+              <a:gd name="adj" fmla="val 15000"/>
+            </a:avLst>
+          </a:prstGeom>
+          <a:solidFill>
+            <a:srgbClr val="5A3F80"/>
+          </a:solidFill>
+          <a:ln/>
+        </p:spPr>
+      </p:sp>
+      <p:sp>
+        <p:nvSpPr>
+          <p:cNvPr id="4" name="Text 2"/>
+          <p:cNvSpPr/>
+          <p:nvPr/>
+        </p:nvSpPr>
+        <p:spPr>
+          <a:xfrm>
+            <a:off x="8138160" y="320040"/>
+            <a:ext cx="3474720" cy="365760"/>
+          </a:xfrm>
+          <a:prstGeom prst="rect">
+            <a:avLst/>
+          </a:prstGeom>
+          <a:noFill/>
+          <a:ln/>
+        </p:spPr>
+        <p:txBody>
+          <a:bodyPr wrap="square" lIns="0" tIns="0" rIns="0" bIns="0" rtlCol="0" anchor="ctr"/>
+          <a:lstStyle/>
+          <a:p>
+            <a:pPr algn="ctr" indent="0" marL="0">
+              <a:buNone/>
+            </a:pPr>
+            <a:r>
+              <a:rPr lang="en-US" sz="1100" i="1" dirty="0">
+                <a:solidFill>
+                  <a:srgbClr val="E0D6F0"/>
+                </a:solidFill>
+                <a:latin typeface="Arial" pitchFamily="34" charset="0"/>
+                <a:ea typeface="Arial" pitchFamily="34" charset="-122"/>
+                <a:cs typeface="Arial" pitchFamily="34" charset="-120"/>
+              </a:rPr>
+              <a:t>Use after: Model Building phase</a:t>
+            </a:r>
+            <a:endParaRPr lang="en-US" sz="1100" dirty="0"/>
+          </a:p>
+        </p:txBody>
+      </p:sp>
+      <p:sp>
+        <p:nvSpPr>
+          <p:cNvPr id="5" name="Text 3"/>
+          <p:cNvSpPr/>
+          <p:nvPr/>
+        </p:nvSpPr>
+        <p:spPr>
+          <a:xfrm>
+            <a:off x="548640" y="868680"/>
+            <a:ext cx="11064240" cy="1325880"/>
+          </a:xfrm>
+          <a:prstGeom prst="rect">
+            <a:avLst/>
+          </a:prstGeom>
+          <a:noFill/>
+          <a:ln/>
+        </p:spPr>
+        <p:txBody>
+          <a:bodyPr wrap="square" lIns="0" tIns="0" rIns="0" bIns="0" rtlCol="0" anchor="ctr"/>
+          <a:lstStyle/>
+          <a:p>
+            <a:pPr indent="0" marL="0">
+              <a:buNone/>
+            </a:pPr>
+            <a:r>
+              <a:rPr lang="en-US" sz="2000" b="1" dirty="0">
+                <a:solidFill>
+                  <a:srgbClr val="FFFFFF"/>
+                </a:solidFill>
+                <a:latin typeface="Arial" pitchFamily="34" charset="0"/>
+                <a:ea typeface="Arial" pitchFamily="34" charset="-122"/>
+                <a:cs typeface="Arial" pitchFamily="34" charset="-120"/>
+              </a:rPr>
+              <a:t>In Mr. Wafula's field, 3 maize seeds and 6 bean seeds failed to germinate because they were in a waterlogged patch. Why does waterlogging stop germination?</a:t>
+            </a:r>
+            <a:endParaRPr lang="en-US" sz="2000" dirty="0"/>
+          </a:p>
+        </p:txBody>
+      </p:sp>
+      <p:sp>
+        <p:nvSpPr>
+          <p:cNvPr id="6" name="Shape 4"/>
+          <p:cNvSpPr/>
+          <p:nvPr/>
+        </p:nvSpPr>
+        <p:spPr>
+          <a:xfrm>
+            <a:off x="731520" y="2331720"/>
+            <a:ext cx="10698480" cy="777240"/>
+          </a:xfrm>
+          <a:prstGeom prst="roundRect">
+            <a:avLst>
+              <a:gd name="adj" fmla="val 9412"/>
+            </a:avLst>
+          </a:prstGeom>
+          <a:solidFill>
+            <a:srgbClr val="7C5CAA"/>
+          </a:solidFill>
+          <a:ln/>
+        </p:spPr>
+      </p:sp>
+      <p:sp>
+        <p:nvSpPr>
+          <p:cNvPr id="7" name="Text 5"/>
+          <p:cNvSpPr/>
+          <p:nvPr/>
+        </p:nvSpPr>
+        <p:spPr>
+          <a:xfrm>
+            <a:off x="914400" y="2331720"/>
+            <a:ext cx="548640" cy="777240"/>
+          </a:xfrm>
+          <a:prstGeom prst="rect">
+            <a:avLst/>
+          </a:prstGeom>
+          <a:noFill/>
+          <a:ln/>
+        </p:spPr>
+        <p:txBody>
+          <a:bodyPr wrap="square" lIns="0" tIns="0" rIns="0" bIns="0" rtlCol="0" anchor="ctr"/>
+          <a:lstStyle/>
+          <a:p>
+            <a:pPr indent="0" marL="0">
+              <a:buNone/>
+            </a:pPr>
+            <a:r>
+              <a:rPr lang="en-US" sz="1800" b="1" dirty="0">
+                <a:solidFill>
+                  <a:srgbClr val="FFFFFF"/>
+                </a:solidFill>
+                <a:latin typeface="Arial" pitchFamily="34" charset="0"/>
+                <a:ea typeface="Arial" pitchFamily="34" charset="-122"/>
+                <a:cs typeface="Arial" pitchFamily="34" charset="-120"/>
+              </a:rPr>
+              <a:t>A</a:t>
             </a:r>
             <a:endParaRPr lang="en-US" sz="1800" dirty="0"/>
+          </a:p>
+        </p:txBody>
+      </p:sp>
+      <p:sp>
+        <p:nvSpPr>
+          <p:cNvPr id="8" name="Text 6"/>
+          <p:cNvSpPr/>
+          <p:nvPr/>
+        </p:nvSpPr>
+        <p:spPr>
+          <a:xfrm>
+            <a:off x="1554480" y="2331720"/>
+            <a:ext cx="9692640" cy="777240"/>
+          </a:xfrm>
+          <a:prstGeom prst="rect">
+            <a:avLst/>
+          </a:prstGeom>
+          <a:noFill/>
+          <a:ln/>
+        </p:spPr>
+        <p:txBody>
+          <a:bodyPr wrap="square" lIns="0" tIns="0" rIns="0" bIns="0" rtlCol="0" anchor="ctr"/>
+          <a:lstStyle/>
+          <a:p>
+            <a:pPr indent="0" marL="0">
+              <a:buNone/>
+            </a:pPr>
+            <a:r>
+              <a:rPr lang="en-US" sz="1500" dirty="0">
+                <a:solidFill>
+                  <a:srgbClr val="FFFFFF"/>
+                </a:solidFill>
+                <a:latin typeface="Arial" pitchFamily="34" charset="0"/>
+                <a:ea typeface="Arial" pitchFamily="34" charset="-122"/>
+                <a:cs typeface="Arial" pitchFamily="34" charset="-120"/>
+              </a:rPr>
+              <a:t>Waterlogged soil makes the seed coat hard, which causes dormancy.</a:t>
+            </a:r>
+            <a:endParaRPr lang="en-US" sz="1500" dirty="0"/>
+          </a:p>
+        </p:txBody>
+      </p:sp>
+      <p:sp>
+        <p:nvSpPr>
+          <p:cNvPr id="9" name="Shape 7"/>
+          <p:cNvSpPr/>
+          <p:nvPr/>
+        </p:nvSpPr>
+        <p:spPr>
+          <a:xfrm>
+            <a:off x="731520" y="3246120"/>
+            <a:ext cx="10698480" cy="777240"/>
+          </a:xfrm>
+          <a:prstGeom prst="roundRect">
+            <a:avLst>
+              <a:gd name="adj" fmla="val 9412"/>
+            </a:avLst>
+          </a:prstGeom>
+          <a:solidFill>
+            <a:srgbClr val="7C5CAA"/>
+          </a:solidFill>
+          <a:ln/>
+        </p:spPr>
+      </p:sp>
+      <p:sp>
+        <p:nvSpPr>
+          <p:cNvPr id="10" name="Text 8"/>
+          <p:cNvSpPr/>
+          <p:nvPr/>
+        </p:nvSpPr>
+        <p:spPr>
+          <a:xfrm>
+            <a:off x="914400" y="3246120"/>
+            <a:ext cx="548640" cy="777240"/>
+          </a:xfrm>
+          <a:prstGeom prst="rect">
+            <a:avLst/>
+          </a:prstGeom>
+          <a:noFill/>
+          <a:ln/>
+        </p:spPr>
+        <p:txBody>
+          <a:bodyPr wrap="square" lIns="0" tIns="0" rIns="0" bIns="0" rtlCol="0" anchor="ctr"/>
+          <a:lstStyle/>
+          <a:p>
+            <a:pPr indent="0" marL="0">
+              <a:buNone/>
+            </a:pPr>
+            <a:r>
+              <a:rPr lang="en-US" sz="1800" b="1" dirty="0">
+                <a:solidFill>
+                  <a:srgbClr val="FFFFFF"/>
+                </a:solidFill>
+                <a:latin typeface="Arial" pitchFamily="34" charset="0"/>
+                <a:ea typeface="Arial" pitchFamily="34" charset="-122"/>
+                <a:cs typeface="Arial" pitchFamily="34" charset="-120"/>
+              </a:rPr>
+              <a:t>B</a:t>
+            </a:r>
+            <a:endParaRPr lang="en-US" sz="1800" dirty="0"/>
+          </a:p>
+        </p:txBody>
+      </p:sp>
+      <p:sp>
+        <p:nvSpPr>
+          <p:cNvPr id="11" name="Text 9"/>
+          <p:cNvSpPr/>
+          <p:nvPr/>
+        </p:nvSpPr>
+        <p:spPr>
+          <a:xfrm>
+            <a:off x="1554480" y="3246120"/>
+            <a:ext cx="9692640" cy="777240"/>
+          </a:xfrm>
+          <a:prstGeom prst="rect">
+            <a:avLst/>
+          </a:prstGeom>
+          <a:noFill/>
+          <a:ln/>
+        </p:spPr>
+        <p:txBody>
+          <a:bodyPr wrap="square" lIns="0" tIns="0" rIns="0" bIns="0" rtlCol="0" anchor="ctr"/>
+          <a:lstStyle/>
+          <a:p>
+            <a:pPr indent="0" marL="0">
+              <a:buNone/>
+            </a:pPr>
+            <a:r>
+              <a:rPr lang="en-US" sz="1500" dirty="0">
+                <a:solidFill>
+                  <a:srgbClr val="FFFFFF"/>
+                </a:solidFill>
+                <a:latin typeface="Arial" pitchFamily="34" charset="0"/>
+                <a:ea typeface="Arial" pitchFamily="34" charset="-122"/>
+                <a:cs typeface="Arial" pitchFamily="34" charset="-120"/>
+              </a:rPr>
+              <a:t>Waterlogged soil is always colder than 4 °C.</a:t>
+            </a:r>
+            <a:endParaRPr lang="en-US" sz="1500" dirty="0"/>
+          </a:p>
+        </p:txBody>
+      </p:sp>
+      <p:sp>
+        <p:nvSpPr>
+          <p:cNvPr id="12" name="Shape 10"/>
+          <p:cNvSpPr/>
+          <p:nvPr/>
+        </p:nvSpPr>
+        <p:spPr>
+          <a:xfrm>
+            <a:off x="731520" y="4160520"/>
+            <a:ext cx="10698480" cy="777240"/>
+          </a:xfrm>
+          <a:prstGeom prst="roundRect">
+            <a:avLst>
+              <a:gd name="adj" fmla="val 9412"/>
+            </a:avLst>
+          </a:prstGeom>
+          <a:solidFill>
+            <a:srgbClr val="7C5CAA"/>
+          </a:solidFill>
+          <a:ln/>
+        </p:spPr>
+      </p:sp>
+      <p:sp>
+        <p:nvSpPr>
+          <p:cNvPr id="13" name="Text 11"/>
+          <p:cNvSpPr/>
+          <p:nvPr/>
+        </p:nvSpPr>
+        <p:spPr>
+          <a:xfrm>
+            <a:off x="914400" y="4160520"/>
+            <a:ext cx="548640" cy="777240"/>
+          </a:xfrm>
+          <a:prstGeom prst="rect">
+            <a:avLst/>
+          </a:prstGeom>
+          <a:noFill/>
+          <a:ln/>
+        </p:spPr>
+        <p:txBody>
+          <a:bodyPr wrap="square" lIns="0" tIns="0" rIns="0" bIns="0" rtlCol="0" anchor="ctr"/>
+          <a:lstStyle/>
+          <a:p>
+            <a:pPr indent="0" marL="0">
+              <a:buNone/>
+            </a:pPr>
+            <a:r>
+              <a:rPr lang="en-US" sz="1800" b="1" dirty="0">
+                <a:solidFill>
+                  <a:srgbClr val="FFFFFF"/>
+                </a:solidFill>
+                <a:latin typeface="Arial" pitchFamily="34" charset="0"/>
+                <a:ea typeface="Arial" pitchFamily="34" charset="-122"/>
+                <a:cs typeface="Arial" pitchFamily="34" charset="-120"/>
+              </a:rPr>
+              <a:t>C</a:t>
+            </a:r>
+            <a:endParaRPr lang="en-US" sz="1800" dirty="0"/>
+          </a:p>
+        </p:txBody>
+      </p:sp>
+      <p:sp>
+        <p:nvSpPr>
+          <p:cNvPr id="14" name="Text 12"/>
+          <p:cNvSpPr/>
+          <p:nvPr/>
+        </p:nvSpPr>
+        <p:spPr>
+          <a:xfrm>
+            <a:off x="1554480" y="4160520"/>
+            <a:ext cx="9692640" cy="777240"/>
+          </a:xfrm>
+          <a:prstGeom prst="rect">
+            <a:avLst/>
+          </a:prstGeom>
+          <a:noFill/>
+          <a:ln/>
+        </p:spPr>
+        <p:txBody>
+          <a:bodyPr wrap="square" lIns="0" tIns="0" rIns="0" bIns="0" rtlCol="0" anchor="ctr"/>
+          <a:lstStyle/>
+          <a:p>
+            <a:pPr indent="0" marL="0">
+              <a:buNone/>
+            </a:pPr>
+            <a:r>
+              <a:rPr lang="en-US" sz="1500" dirty="0">
+                <a:solidFill>
+                  <a:srgbClr val="FFFFFF"/>
+                </a:solidFill>
+                <a:latin typeface="Arial" pitchFamily="34" charset="0"/>
+                <a:ea typeface="Arial" pitchFamily="34" charset="-122"/>
+                <a:cs typeface="Arial" pitchFamily="34" charset="-120"/>
+              </a:rPr>
+              <a:t>The water fills the air spaces in the soil, so the seeds get too little oxygen for respiration.</a:t>
+            </a:r>
+            <a:endParaRPr lang="en-US" sz="1500" dirty="0"/>
+          </a:p>
+        </p:txBody>
+      </p:sp>
+      <p:sp>
+        <p:nvSpPr>
+          <p:cNvPr id="15" name="Shape 13"/>
+          <p:cNvSpPr/>
+          <p:nvPr/>
+        </p:nvSpPr>
+        <p:spPr>
+          <a:xfrm>
+            <a:off x="731520" y="5074920"/>
+            <a:ext cx="10698480" cy="777240"/>
+          </a:xfrm>
+          <a:prstGeom prst="roundRect">
+            <a:avLst>
+              <a:gd name="adj" fmla="val 9412"/>
+            </a:avLst>
+          </a:prstGeom>
+          <a:solidFill>
+            <a:srgbClr val="7C5CAA"/>
+          </a:solidFill>
+          <a:ln/>
+        </p:spPr>
+      </p:sp>
+      <p:sp>
+        <p:nvSpPr>
+          <p:cNvPr id="16" name="Text 14"/>
+          <p:cNvSpPr/>
+          <p:nvPr/>
+        </p:nvSpPr>
+        <p:spPr>
+          <a:xfrm>
+            <a:off x="914400" y="5074920"/>
+            <a:ext cx="548640" cy="777240"/>
+          </a:xfrm>
+          <a:prstGeom prst="rect">
+            <a:avLst/>
+          </a:prstGeom>
+          <a:noFill/>
+          <a:ln/>
+        </p:spPr>
+        <p:txBody>
+          <a:bodyPr wrap="square" lIns="0" tIns="0" rIns="0" bIns="0" rtlCol="0" anchor="ctr"/>
+          <a:lstStyle/>
+          <a:p>
+            <a:pPr indent="0" marL="0">
+              <a:buNone/>
+            </a:pPr>
+            <a:r>
+              <a:rPr lang="en-US" sz="1800" b="1" dirty="0">
+                <a:solidFill>
+                  <a:srgbClr val="FFFFFF"/>
+                </a:solidFill>
+                <a:latin typeface="Arial" pitchFamily="34" charset="0"/>
+                <a:ea typeface="Arial" pitchFamily="34" charset="-122"/>
+                <a:cs typeface="Arial" pitchFamily="34" charset="-120"/>
+              </a:rPr>
+              <a:t>D</a:t>
+            </a:r>
+            <a:endParaRPr lang="en-US" sz="1800" dirty="0"/>
+          </a:p>
+        </p:txBody>
+      </p:sp>
+      <p:sp>
+        <p:nvSpPr>
+          <p:cNvPr id="17" name="Text 15"/>
+          <p:cNvSpPr/>
+          <p:nvPr/>
+        </p:nvSpPr>
+        <p:spPr>
+          <a:xfrm>
+            <a:off x="1554480" y="5074920"/>
+            <a:ext cx="9692640" cy="777240"/>
+          </a:xfrm>
+          <a:prstGeom prst="rect">
+            <a:avLst/>
+          </a:prstGeom>
+          <a:noFill/>
+          <a:ln/>
+        </p:spPr>
+        <p:txBody>
+          <a:bodyPr wrap="square" lIns="0" tIns="0" rIns="0" bIns="0" rtlCol="0" anchor="ctr"/>
+          <a:lstStyle/>
+          <a:p>
+            <a:pPr indent="0" marL="0">
+              <a:buNone/>
+            </a:pPr>
+            <a:r>
+              <a:rPr lang="en-US" sz="1500" dirty="0">
+                <a:solidFill>
+                  <a:srgbClr val="FFFFFF"/>
+                </a:solidFill>
+                <a:latin typeface="Arial" pitchFamily="34" charset="0"/>
+                <a:ea typeface="Arial" pitchFamily="34" charset="-122"/>
+                <a:cs typeface="Arial" pitchFamily="34" charset="-120"/>
+              </a:rPr>
+              <a:t>Too much water makes the seed produce too much gibberellin.</a:t>
+            </a:r>
+            <a:endParaRPr lang="en-US" sz="1500" dirty="0"/>
+          </a:p>
+        </p:txBody>
+      </p:sp>
+      <p:sp>
+        <p:nvSpPr>
+          <p:cNvPr id="18" name="Text 16"/>
+          <p:cNvSpPr/>
+          <p:nvPr/>
+        </p:nvSpPr>
+        <p:spPr>
+          <a:xfrm>
+            <a:off x="11521440" y="6446520"/>
+            <a:ext cx="457200" cy="274320"/>
+          </a:xfrm>
+          <a:prstGeom prst="rect">
+            <a:avLst/>
+          </a:prstGeom>
+          <a:noFill/>
+          <a:ln/>
+        </p:spPr>
+        <p:txBody>
+          <a:bodyPr wrap="square" lIns="0" tIns="0" rIns="0" bIns="0" rtlCol="0" anchor="ctr"/>
+          <a:lstStyle/>
+          <a:p>
+            <a:pPr algn="r" indent="0" marL="0">
+              <a:buNone/>
+            </a:pPr>
+            <a:r>
+              <a:rPr lang="en-US" sz="1000" dirty="0">
+                <a:solidFill>
+                  <a:srgbClr val="C9B8E0"/>
+                </a:solidFill>
+                <a:latin typeface="Arial" pitchFamily="34" charset="0"/>
+                <a:ea typeface="Arial" pitchFamily="34" charset="-122"/>
+                <a:cs typeface="Arial" pitchFamily="34" charset="-120"/>
+              </a:rPr>
+              <a:t>9</a:t>
+            </a:r>
+            <a:endParaRPr lang="en-US" sz="1000" dirty="0"/>
           </a:p>
         </p:txBody>
       </p:sp>
